--- a/brand/bestae/updated-files/Bestae Template (updated palette).pptx
+++ b/brand/bestae/updated-files/Bestae Template (updated palette).pptx
@@ -4047,7 +4047,7 @@
                 <a:ea typeface="Times New Roman" panose="02020603050405020304" pitchFamily="18" charset="0"/>
                 <a:cs typeface="Times New Roman" panose="02020603050405020304" pitchFamily="18" charset="0"/>
               </a:rPr>
-              <a:t>: #EFF4A4; }</a:t>
+              <a:t>: #E8F6C4; }</a:t>
             </a:r>
             <a:endParaRPr lang="en-AU" sz="1800" dirty="0">
               <a:effectLst/>
@@ -4161,7 +4161,7 @@
                 <a:ea typeface="Times New Roman" panose="02020603050405020304" pitchFamily="18" charset="0"/>
                 <a:cs typeface="Times New Roman" panose="02020603050405020304" pitchFamily="18" charset="0"/>
               </a:rPr>
-              <a:t>: #D5EBEE; }</a:t>
+              <a:t>: #D2DCE8; }</a:t>
             </a:r>
             <a:endParaRPr lang="en-AU" sz="1800" dirty="0">
               <a:effectLst/>
@@ -4237,7 +4237,7 @@
                 <a:ea typeface="Times New Roman" panose="02020603050405020304" pitchFamily="18" charset="0"/>
                 <a:cs typeface="Times New Roman" panose="02020603050405020304" pitchFamily="18" charset="0"/>
               </a:rPr>
-              <a:t>: #F2DEE9; }</a:t>
+              <a:t>: #F7D0E6; }</a:t>
             </a:r>
             <a:endParaRPr lang="en-AU" sz="1800" dirty="0">
               <a:effectLst/>
